--- a/2026_Sept_Work/W01_Deep_Learning_Foundations.pptx
+++ b/2026_Sept_Work/W01_Deep_Learning_Foundations.pptx
@@ -5261,7 +5261,15 @@
                   <a:srgbClr val="0F172A"/>
                 </a:solidFill>
               </a:rPr>
-              <a:t>z = w₁x₁ + w₂x₂ + ⋯ + wₙxₙ + b</a:t>
+              <a:t>z = w₁x₁ + w₂x₂ + ⋯ + wₙxₙ + b </a:t>
+            </a:r>
+            <a:r>
+              <a:rPr lang="en-US" sz="2200" b="1">
+                <a:solidFill>
+                  <a:srgbClr val="0F172A"/>
+                </a:solidFill>
+              </a:rPr>
+              <a:t>| Linearity</a:t>
             </a:r>
             <a:endParaRPr lang="en-US" sz="2200" dirty="0"/>
           </a:p>
@@ -5276,7 +5284,7 @@
         <p:spPr>
           <a:xfrm>
             <a:off x="868680" y="4828032"/>
-            <a:ext cx="1828800" cy="365760"/>
+            <a:ext cx="6208776" cy="365760"/>
           </a:xfrm>
           <a:prstGeom prst="rect">
             <a:avLst/>
@@ -5297,7 +5305,7 @@
                   <a:srgbClr val="12B886"/>
                 </a:solidFill>
               </a:rPr>
-              <a:t>a = g(z)</a:t>
+              <a:t>a = g(z) | Introduce Non-Linearity </a:t>
             </a:r>
             <a:endParaRPr lang="en-US" sz="2200" dirty="0"/>
           </a:p>
